--- a/presentaciones/video_avance_1/AFG1_Video1_Presentacion_UC.pptx
+++ b/presentaciones/video_avance_1/AFG1_Video1_Presentacion_UC.pptx
@@ -218,7 +218,7 @@
           <a:p>
             <a:fld id="{68B07875-FBB4-E24A-BDDE-B8BBEBD8D5C9}" type="datetimeFigureOut">
               <a:rPr lang="es-ES" smtClean="0"/>
-              <a:t>13/8/26</a:t>
+              <a:t>15/8/26</a:t>
             </a:fld>
             <a:endParaRPr lang="es-ES"/>
           </a:p>
@@ -570,6 +570,174 @@
 </p:notes>
 </file>
 
+<file path=ppt/notesSlides/notesSlide2.xml><?xml version="1.0" encoding="utf-8"?>
+<p:notes xmlns:a="http://schemas.openxmlformats.org/drawingml/2006/main" xmlns:r="http://schemas.openxmlformats.org/officeDocument/2006/relationships" xmlns:p="http://schemas.openxmlformats.org/presentationml/2006/main">
+  <p:cSld>
+    <p:spTree>
+      <p:nvGrpSpPr>
+        <p:cNvPr id="1" name=""/>
+        <p:cNvGrpSpPr/>
+        <p:nvPr/>
+      </p:nvGrpSpPr>
+      <p:grpSpPr>
+        <a:xfrm>
+          <a:off x="0" y="0"/>
+          <a:ext cx="0" cy="0"/>
+          <a:chOff x="0" y="0"/>
+          <a:chExt cx="0" cy="0"/>
+        </a:xfrm>
+      </p:grpSpPr>
+      <p:sp>
+        <p:nvSpPr>
+          <p:cNvPr id="2" name="Marcador de imagen de diapositiva 1"/>
+          <p:cNvSpPr>
+            <a:spLocks noGrp="1" noRot="1" noChangeAspect="1"/>
+          </p:cNvSpPr>
+          <p:nvPr>
+            <p:ph type="sldImg"/>
+          </p:nvPr>
+        </p:nvSpPr>
+        <p:spPr/>
+      </p:sp>
+      <p:sp>
+        <p:nvSpPr>
+          <p:cNvPr id="3" name="Marcador de notas 2"/>
+          <p:cNvSpPr>
+            <a:spLocks noGrp="1"/>
+          </p:cNvSpPr>
+          <p:nvPr>
+            <p:ph type="body" idx="1"/>
+          </p:nvPr>
+        </p:nvSpPr>
+        <p:spPr/>
+        <p:txBody>
+          <a:bodyPr/>
+          <a:lstStyle/>
+          <a:p>
+            <a:endParaRPr lang="es-CL" dirty="0"/>
+          </a:p>
+        </p:txBody>
+      </p:sp>
+      <p:sp>
+        <p:nvSpPr>
+          <p:cNvPr id="4" name="Marcador de número de diapositiva 3"/>
+          <p:cNvSpPr>
+            <a:spLocks noGrp="1"/>
+          </p:cNvSpPr>
+          <p:nvPr>
+            <p:ph type="sldNum" sz="quarter" idx="5"/>
+          </p:nvPr>
+        </p:nvSpPr>
+        <p:spPr/>
+        <p:txBody>
+          <a:bodyPr/>
+          <a:lstStyle/>
+          <a:p>
+            <a:fld id="{8A0FB505-4C2B-1B4C-9533-CA0B69CD73D7}" type="slidenum">
+              <a:rPr lang="es-ES" smtClean="0"/>
+              <a:t>3</a:t>
+            </a:fld>
+            <a:endParaRPr lang="es-ES"/>
+          </a:p>
+        </p:txBody>
+      </p:sp>
+    </p:spTree>
+    <p:extLst>
+      <p:ext uri="{BB962C8B-B14F-4D97-AF65-F5344CB8AC3E}">
+        <p14:creationId xmlns:p14="http://schemas.microsoft.com/office/powerpoint/2010/main" val="695222133"/>
+      </p:ext>
+    </p:extLst>
+  </p:cSld>
+  <p:clrMapOvr>
+    <a:masterClrMapping/>
+  </p:clrMapOvr>
+</p:notes>
+</file>
+
+<file path=ppt/notesSlides/notesSlide3.xml><?xml version="1.0" encoding="utf-8"?>
+<p:notes xmlns:a="http://schemas.openxmlformats.org/drawingml/2006/main" xmlns:r="http://schemas.openxmlformats.org/officeDocument/2006/relationships" xmlns:p="http://schemas.openxmlformats.org/presentationml/2006/main">
+  <p:cSld>
+    <p:spTree>
+      <p:nvGrpSpPr>
+        <p:cNvPr id="1" name=""/>
+        <p:cNvGrpSpPr/>
+        <p:nvPr/>
+      </p:nvGrpSpPr>
+      <p:grpSpPr>
+        <a:xfrm>
+          <a:off x="0" y="0"/>
+          <a:ext cx="0" cy="0"/>
+          <a:chOff x="0" y="0"/>
+          <a:chExt cx="0" cy="0"/>
+        </a:xfrm>
+      </p:grpSpPr>
+      <p:sp>
+        <p:nvSpPr>
+          <p:cNvPr id="2" name="Marcador de imagen de diapositiva 1"/>
+          <p:cNvSpPr>
+            <a:spLocks noGrp="1" noRot="1" noChangeAspect="1"/>
+          </p:cNvSpPr>
+          <p:nvPr>
+            <p:ph type="sldImg"/>
+          </p:nvPr>
+        </p:nvSpPr>
+        <p:spPr/>
+      </p:sp>
+      <p:sp>
+        <p:nvSpPr>
+          <p:cNvPr id="3" name="Marcador de notas 2"/>
+          <p:cNvSpPr>
+            <a:spLocks noGrp="1"/>
+          </p:cNvSpPr>
+          <p:nvPr>
+            <p:ph type="body" idx="1"/>
+          </p:nvPr>
+        </p:nvSpPr>
+        <p:spPr/>
+        <p:txBody>
+          <a:bodyPr/>
+          <a:lstStyle/>
+          <a:p>
+            <a:endParaRPr lang="es-CL" dirty="0"/>
+          </a:p>
+        </p:txBody>
+      </p:sp>
+      <p:sp>
+        <p:nvSpPr>
+          <p:cNvPr id="4" name="Marcador de número de diapositiva 3"/>
+          <p:cNvSpPr>
+            <a:spLocks noGrp="1"/>
+          </p:cNvSpPr>
+          <p:nvPr>
+            <p:ph type="sldNum" sz="quarter" idx="5"/>
+          </p:nvPr>
+        </p:nvSpPr>
+        <p:spPr/>
+        <p:txBody>
+          <a:bodyPr/>
+          <a:lstStyle/>
+          <a:p>
+            <a:fld id="{8A0FB505-4C2B-1B4C-9533-CA0B69CD73D7}" type="slidenum">
+              <a:rPr lang="es-ES" smtClean="0"/>
+              <a:t>5</a:t>
+            </a:fld>
+            <a:endParaRPr lang="es-ES"/>
+          </a:p>
+        </p:txBody>
+      </p:sp>
+    </p:spTree>
+    <p:extLst>
+      <p:ext uri="{BB962C8B-B14F-4D97-AF65-F5344CB8AC3E}">
+        <p14:creationId xmlns:p14="http://schemas.microsoft.com/office/powerpoint/2010/main" val="75333073"/>
+      </p:ext>
+    </p:extLst>
+  </p:cSld>
+  <p:clrMapOvr>
+    <a:masterClrMapping/>
+  </p:clrMapOvr>
+</p:notes>
+</file>
+
 <file path=ppt/slideLayouts/slideLayout1.xml><?xml version="1.0" encoding="utf-8"?>
 <p:sldLayout xmlns:a="http://schemas.openxmlformats.org/drawingml/2006/main" xmlns:r="http://schemas.openxmlformats.org/officeDocument/2006/relationships" xmlns:p="http://schemas.openxmlformats.org/presentationml/2006/main" preserve="1">
   <p:cSld name="1_Diseño personalizado">
@@ -865,7 +1033,7 @@
           <a:p>
             <a:fld id="{CC73C310-44D8-D44E-9500-41BAE48D6C1F}" type="datetimeFigureOut">
               <a:rPr lang="es-ES" smtClean="0"/>
-              <a:t>13/8/26</a:t>
+              <a:t>15/8/26</a:t>
             </a:fld>
             <a:endParaRPr lang="es-ES"/>
           </a:p>
@@ -1071,7 +1239,7 @@
           <a:p>
             <a:fld id="{64248F72-65B5-4A4E-B82F-2E1A76141EF9}" type="datetimeFigureOut">
               <a:rPr lang="es-ES" smtClean="0"/>
-              <a:t>13/8/26</a:t>
+              <a:t>15/8/26</a:t>
             </a:fld>
             <a:endParaRPr lang="es-ES"/>
           </a:p>
@@ -1383,7 +1551,7 @@
           <a:p>
             <a:fld id="{64248F72-65B5-4A4E-B82F-2E1A76141EF9}" type="datetimeFigureOut">
               <a:rPr lang="es-ES" smtClean="0"/>
-              <a:t>13/8/26</a:t>
+              <a:t>15/8/26</a:t>
             </a:fld>
             <a:endParaRPr lang="es-ES"/>
           </a:p>
@@ -1679,7 +1847,7 @@
           <a:p>
             <a:fld id="{64248F72-65B5-4A4E-B82F-2E1A76141EF9}" type="datetimeFigureOut">
               <a:rPr lang="es-ES" smtClean="0"/>
-              <a:t>13/8/26</a:t>
+              <a:t>15/8/26</a:t>
             </a:fld>
             <a:endParaRPr lang="es-ES"/>
           </a:p>
@@ -1850,7 +2018,7 @@
             <a:fld id="{64248F72-65B5-4A4E-B82F-2E1A76141EF9}" type="datetimeFigureOut">
               <a:rPr lang="es-ES" smtClean="0"/>
               <a:pPr/>
-              <a:t>13/8/26</a:t>
+              <a:t>15/8/26</a:t>
             </a:fld>
             <a:endParaRPr lang="es-ES"/>
           </a:p>
@@ -2021,7 +2189,7 @@
           <a:p>
             <a:fld id="{64248F72-65B5-4A4E-B82F-2E1A76141EF9}" type="datetimeFigureOut">
               <a:rPr lang="es-ES" smtClean="0"/>
-              <a:t>13/8/26</a:t>
+              <a:t>15/8/26</a:t>
             </a:fld>
             <a:endParaRPr lang="es-ES"/>
           </a:p>
@@ -2294,7 +2462,7 @@
             <a:fld id="{64248F72-65B5-4A4E-B82F-2E1A76141EF9}" type="datetimeFigureOut">
               <a:rPr lang="es-ES" smtClean="0"/>
               <a:pPr/>
-              <a:t>13/8/26</a:t>
+              <a:t>15/8/26</a:t>
             </a:fld>
             <a:endParaRPr lang="es-ES"/>
           </a:p>
@@ -4030,7 +4198,7 @@
         <p:spPr>
           <a:xfrm>
             <a:off x="612648" y="3950208"/>
-            <a:ext cx="2542032" cy="402336"/>
+            <a:ext cx="1883664" cy="402336"/>
           </a:xfrm>
           <a:prstGeom prst="roundRect">
             <a:avLst>
@@ -4076,8 +4244,8 @@
         </p:nvSpPr>
         <p:spPr>
           <a:xfrm>
-            <a:off x="722376" y="3950208"/>
-            <a:ext cx="2377440" cy="402336"/>
+            <a:off x="685800" y="3950208"/>
+            <a:ext cx="1737360" cy="402336"/>
           </a:xfrm>
           <a:prstGeom prst="rect">
             <a:avLst/>
@@ -4090,9 +4258,9 @@
           </a:bodyPr>
           <a:lstStyle/>
           <a:p>
-            <a:pPr algn="l"/>
-            <a:r>
-              <a:rPr sz="1000" b="1" i="0">
+            <a:pPr algn="ctr"/>
+            <a:r>
+              <a:rPr sz="819" b="1" i="0">
                 <a:solidFill>
                   <a:srgbClr val="17375D"/>
                 </a:solidFill>
@@ -4111,8 +4279,8 @@
         </p:nvSpPr>
         <p:spPr>
           <a:xfrm>
-            <a:off x="3282696" y="3950208"/>
-            <a:ext cx="2542032" cy="402336"/>
+            <a:off x="2624328" y="3950208"/>
+            <a:ext cx="1883664" cy="402336"/>
           </a:xfrm>
           <a:prstGeom prst="roundRect">
             <a:avLst>
@@ -4158,8 +4326,8 @@
         </p:nvSpPr>
         <p:spPr>
           <a:xfrm>
-            <a:off x="3392424" y="3950208"/>
-            <a:ext cx="2377440" cy="402336"/>
+            <a:off x="2697480" y="3950208"/>
+            <a:ext cx="1737360" cy="402336"/>
           </a:xfrm>
           <a:prstGeom prst="rect">
             <a:avLst/>
@@ -4172,9 +4340,9 @@
           </a:bodyPr>
           <a:lstStyle/>
           <a:p>
-            <a:pPr algn="l"/>
-            <a:r>
-              <a:rPr sz="1000" b="1" i="0">
+            <a:pPr algn="ctr"/>
+            <a:r>
+              <a:rPr sz="819" b="1" i="0">
                 <a:solidFill>
                   <a:srgbClr val="17375D"/>
                 </a:solidFill>
@@ -4193,8 +4361,8 @@
         </p:nvSpPr>
         <p:spPr>
           <a:xfrm>
-            <a:off x="5952744" y="3950208"/>
-            <a:ext cx="2542032" cy="402336"/>
+            <a:off x="4636008" y="3950208"/>
+            <a:ext cx="1883664" cy="402336"/>
           </a:xfrm>
           <a:prstGeom prst="roundRect">
             <a:avLst>
@@ -4240,8 +4408,8 @@
         </p:nvSpPr>
         <p:spPr>
           <a:xfrm>
-            <a:off x="6062472" y="3950208"/>
-            <a:ext cx="2377440" cy="402336"/>
+            <a:off x="4709160" y="3950208"/>
+            <a:ext cx="1737360" cy="402336"/>
           </a:xfrm>
           <a:prstGeom prst="rect">
             <a:avLst/>
@@ -4254,9 +4422,9 @@
           </a:bodyPr>
           <a:lstStyle/>
           <a:p>
-            <a:pPr algn="l"/>
-            <a:r>
-              <a:rPr sz="1000" b="1" i="0">
+            <a:pPr algn="ctr"/>
+            <a:r>
+              <a:rPr sz="819" b="1" i="0">
                 <a:solidFill>
                   <a:srgbClr val="17375D"/>
                 </a:solidFill>
@@ -4269,7 +4437,89 @@
       </p:sp>
       <p:sp>
         <p:nvSpPr>
-          <p:cNvPr id="12" name="TextBox 11"/>
+          <p:cNvPr id="12" name="Rounded Rectangle 11"/>
+          <p:cNvSpPr/>
+          <p:nvPr/>
+        </p:nvSpPr>
+        <p:spPr>
+          <a:xfrm>
+            <a:off x="6647688" y="3950208"/>
+            <a:ext cx="1883664" cy="402336"/>
+          </a:xfrm>
+          <a:prstGeom prst="roundRect">
+            <a:avLst>
+              <a:gd name="adj" fmla="val 18000"/>
+            </a:avLst>
+          </a:prstGeom>
+          <a:solidFill>
+            <a:srgbClr val="EAF2FD"/>
+          </a:solidFill>
+          <a:ln>
+            <a:noFill/>
+          </a:ln>
+          <a:effectLst/>
+        </p:spPr>
+        <p:style>
+          <a:lnRef idx="1">
+            <a:schemeClr val="accent1"/>
+          </a:lnRef>
+          <a:fillRef idx="3">
+            <a:schemeClr val="accent1"/>
+          </a:fillRef>
+          <a:effectRef idx="2">
+            <a:schemeClr val="accent1"/>
+          </a:effectRef>
+          <a:fontRef idx="minor">
+            <a:schemeClr val="lt1"/>
+          </a:fontRef>
+        </p:style>
+        <p:txBody>
+          <a:bodyPr rtlCol="0" anchor="ctr"/>
+          <a:lstStyle/>
+          <a:p>
+            <a:pPr algn="ctr"/>
+            <a:endParaRPr/>
+          </a:p>
+        </p:txBody>
+      </p:sp>
+      <p:sp>
+        <p:nvSpPr>
+          <p:cNvPr id="13" name="TextBox 12"/>
+          <p:cNvSpPr txBox="1"/>
+          <p:nvPr/>
+        </p:nvSpPr>
+        <p:spPr>
+          <a:xfrm>
+            <a:off x="6720840" y="3950208"/>
+            <a:ext cx="1737360" cy="402336"/>
+          </a:xfrm>
+          <a:prstGeom prst="rect">
+            <a:avLst/>
+          </a:prstGeom>
+          <a:noFill/>
+        </p:spPr>
+        <p:txBody>
+          <a:bodyPr wrap="square" lIns="0" tIns="0" rIns="0" bIns="0" anchor="ctr">
+            <a:spAutoFit/>
+          </a:bodyPr>
+          <a:lstStyle/>
+          <a:p>
+            <a:pPr algn="ctr"/>
+            <a:r>
+              <a:rPr sz="819" b="1" i="0">
+                <a:solidFill>
+                  <a:srgbClr val="17375D"/>
+                </a:solidFill>
+                <a:latin typeface="Calibri"/>
+              </a:rPr>
+              <a:t>Esteban Adolfo González Rodríguez</a:t>
+            </a:r>
+          </a:p>
+        </p:txBody>
+      </p:sp>
+      <p:sp>
+        <p:nvSpPr>
+          <p:cNvPr id="14" name="TextBox 13"/>
           <p:cNvSpPr txBox="1"/>
           <p:nvPr/>
         </p:nvSpPr>
@@ -5596,7 +5846,7 @@
           <p:nvPr/>
         </p:nvPicPr>
         <p:blipFill>
-          <a:blip r:embed="rId2"/>
+          <a:blip r:embed="rId3"/>
           <a:stretch>
             <a:fillRect/>
           </a:stretch>
@@ -5786,7 +6036,7 @@
           <p:nvPr/>
         </p:nvPicPr>
         <p:blipFill>
-          <a:blip r:embed="rId3"/>
+          <a:blip r:embed="rId4"/>
           <a:stretch>
             <a:fillRect/>
           </a:stretch>
@@ -5976,7 +6226,7 @@
           <p:nvPr/>
         </p:nvPicPr>
         <p:blipFill>
-          <a:blip r:embed="rId4"/>
+          <a:blip r:embed="rId5"/>
           <a:stretch>
             <a:fillRect/>
           </a:stretch>
@@ -6168,7 +6418,7 @@
           <p:nvPr/>
         </p:nvPicPr>
         <p:blipFill>
-          <a:blip r:embed="rId5"/>
+          <a:blip r:embed="rId6"/>
           <a:stretch>
             <a:fillRect/>
           </a:stretch>
@@ -6191,8 +6441,8 @@
         </p:nvSpPr>
         <p:spPr>
           <a:xfrm>
-            <a:off x="1261872" y="3712463"/>
-            <a:ext cx="5504688" cy="749808"/>
+            <a:off x="1261872" y="3944251"/>
+            <a:ext cx="5504688" cy="286232"/>
           </a:xfrm>
           <a:prstGeom prst="rect">
             <a:avLst/>
@@ -6207,23 +6457,272 @@
           <a:p>
             <a:pPr algn="l"/>
             <a:r>
-              <a:rPr sz="930" b="1" i="0">
+              <a:rPr sz="930" b="1" i="0" dirty="0">
                 <a:solidFill>
                   <a:srgbClr val="1A1A1A"/>
                 </a:solidFill>
                 <a:latin typeface="Calibri"/>
               </a:rPr>
-              <a:t>Punto de partida operativo. </a:t>
-            </a:r>
-            <a:r>
-              <a:rPr sz="930" b="0" i="0">
+              <a:t>Punto de </a:t>
+            </a:r>
+            <a:r>
+              <a:rPr sz="930" b="1" i="0" dirty="0" err="1">
+                <a:solidFill>
+                  <a:srgbClr val="1A1A1A"/>
+                </a:solidFill>
+                <a:latin typeface="Calibri"/>
+              </a:rPr>
+              <a:t>partida</a:t>
+            </a:r>
+            <a:r>
+              <a:rPr sz="930" b="1" i="0" dirty="0">
+                <a:solidFill>
+                  <a:srgbClr val="1A1A1A"/>
+                </a:solidFill>
+                <a:latin typeface="Calibri"/>
+              </a:rPr>
+              <a:t> </a:t>
+            </a:r>
+            <a:r>
+              <a:rPr sz="930" b="1" i="0" dirty="0" err="1">
+                <a:solidFill>
+                  <a:srgbClr val="1A1A1A"/>
+                </a:solidFill>
+                <a:latin typeface="Calibri"/>
+              </a:rPr>
+              <a:t>operativo</a:t>
+            </a:r>
+            <a:r>
+              <a:rPr sz="930" b="1" i="0" dirty="0">
+                <a:solidFill>
+                  <a:srgbClr val="1A1A1A"/>
+                </a:solidFill>
+                <a:latin typeface="Calibri"/>
+              </a:rPr>
+              <a:t>. </a:t>
+            </a:r>
+            <a:r>
+              <a:rPr sz="930" b="0" i="0" dirty="0">
                 <a:solidFill>
                   <a:srgbClr val="52514E"/>
                 </a:solidFill>
                 <a:latin typeface="Calibri"/>
               </a:rPr>
-              <a:t>El repositorio del proyecto ya integra descargadores verificados para 10 productos satelitales / de reanálisis y la red SINCA, con recorte automático a Chile, estructura reproducible y bibliografía en formato APA.</a:t>
-            </a:r>
+              <a:t>El </a:t>
+            </a:r>
+            <a:r>
+              <a:rPr sz="930" b="0" i="0" dirty="0" err="1">
+                <a:solidFill>
+                  <a:srgbClr val="52514E"/>
+                </a:solidFill>
+                <a:latin typeface="Calibri"/>
+              </a:rPr>
+              <a:t>repositorio</a:t>
+            </a:r>
+            <a:r>
+              <a:rPr sz="930" b="0" i="0" dirty="0">
+                <a:solidFill>
+                  <a:srgbClr val="52514E"/>
+                </a:solidFill>
+                <a:latin typeface="Calibri"/>
+              </a:rPr>
+              <a:t> del </a:t>
+            </a:r>
+            <a:r>
+              <a:rPr sz="930" b="0" i="0" dirty="0" err="1">
+                <a:solidFill>
+                  <a:srgbClr val="52514E"/>
+                </a:solidFill>
+                <a:latin typeface="Calibri"/>
+              </a:rPr>
+              <a:t>proyecto</a:t>
+            </a:r>
+            <a:r>
+              <a:rPr sz="930" b="0" i="0" dirty="0">
+                <a:solidFill>
+                  <a:srgbClr val="52514E"/>
+                </a:solidFill>
+                <a:latin typeface="Calibri"/>
+              </a:rPr>
+              <a:t> </a:t>
+            </a:r>
+            <a:r>
+              <a:rPr sz="930" b="0" i="0" dirty="0" err="1">
+                <a:solidFill>
+                  <a:srgbClr val="52514E"/>
+                </a:solidFill>
+                <a:latin typeface="Calibri"/>
+              </a:rPr>
+              <a:t>ya</a:t>
+            </a:r>
+            <a:r>
+              <a:rPr sz="930" b="0" i="0" dirty="0">
+                <a:solidFill>
+                  <a:srgbClr val="52514E"/>
+                </a:solidFill>
+                <a:latin typeface="Calibri"/>
+              </a:rPr>
+              <a:t> integra </a:t>
+            </a:r>
+            <a:r>
+              <a:rPr sz="930" b="0" i="0" dirty="0" err="1">
+                <a:solidFill>
+                  <a:srgbClr val="52514E"/>
+                </a:solidFill>
+                <a:latin typeface="Calibri"/>
+              </a:rPr>
+              <a:t>descargadores</a:t>
+            </a:r>
+            <a:r>
+              <a:rPr sz="930" b="0" i="0" dirty="0">
+                <a:solidFill>
+                  <a:srgbClr val="52514E"/>
+                </a:solidFill>
+                <a:latin typeface="Calibri"/>
+              </a:rPr>
+              <a:t> </a:t>
+            </a:r>
+            <a:r>
+              <a:rPr sz="930" b="0" i="0" dirty="0" err="1">
+                <a:solidFill>
+                  <a:srgbClr val="52514E"/>
+                </a:solidFill>
+                <a:latin typeface="Calibri"/>
+              </a:rPr>
+              <a:t>verificados</a:t>
+            </a:r>
+            <a:r>
+              <a:rPr sz="930" b="0" i="0" dirty="0">
+                <a:solidFill>
+                  <a:srgbClr val="52514E"/>
+                </a:solidFill>
+                <a:latin typeface="Calibri"/>
+              </a:rPr>
+              <a:t> para 10 </a:t>
+            </a:r>
+            <a:r>
+              <a:rPr sz="930" b="0" i="0" dirty="0" err="1">
+                <a:solidFill>
+                  <a:srgbClr val="52514E"/>
+                </a:solidFill>
+                <a:latin typeface="Calibri"/>
+              </a:rPr>
+              <a:t>productos</a:t>
+            </a:r>
+            <a:r>
+              <a:rPr sz="930" b="0" i="0" dirty="0">
+                <a:solidFill>
+                  <a:srgbClr val="52514E"/>
+                </a:solidFill>
+                <a:latin typeface="Calibri"/>
+              </a:rPr>
+              <a:t> </a:t>
+            </a:r>
+            <a:r>
+              <a:rPr sz="930" b="0" i="0" dirty="0" err="1">
+                <a:solidFill>
+                  <a:srgbClr val="52514E"/>
+                </a:solidFill>
+                <a:latin typeface="Calibri"/>
+              </a:rPr>
+              <a:t>satelitales</a:t>
+            </a:r>
+            <a:r>
+              <a:rPr sz="930" b="0" i="0" dirty="0">
+                <a:solidFill>
+                  <a:srgbClr val="52514E"/>
+                </a:solidFill>
+                <a:latin typeface="Calibri"/>
+              </a:rPr>
+              <a:t> / de </a:t>
+            </a:r>
+            <a:r>
+              <a:rPr sz="930" b="0" i="0" dirty="0" err="1">
+                <a:solidFill>
+                  <a:srgbClr val="52514E"/>
+                </a:solidFill>
+                <a:latin typeface="Calibri"/>
+              </a:rPr>
+              <a:t>reanálisis</a:t>
+            </a:r>
+            <a:r>
+              <a:rPr sz="930" b="0" i="0" dirty="0">
+                <a:solidFill>
+                  <a:srgbClr val="52514E"/>
+                </a:solidFill>
+                <a:latin typeface="Calibri"/>
+              </a:rPr>
+              <a:t> y la red SINCA, con </a:t>
+            </a:r>
+            <a:r>
+              <a:rPr sz="930" b="0" i="0" dirty="0" err="1">
+                <a:solidFill>
+                  <a:srgbClr val="52514E"/>
+                </a:solidFill>
+                <a:latin typeface="Calibri"/>
+              </a:rPr>
+              <a:t>recorte</a:t>
+            </a:r>
+            <a:r>
+              <a:rPr sz="930" b="0" i="0" dirty="0">
+                <a:solidFill>
+                  <a:srgbClr val="52514E"/>
+                </a:solidFill>
+                <a:latin typeface="Calibri"/>
+              </a:rPr>
+              <a:t> </a:t>
+            </a:r>
+            <a:r>
+              <a:rPr sz="930" b="0" i="0" dirty="0" err="1">
+                <a:solidFill>
+                  <a:srgbClr val="52514E"/>
+                </a:solidFill>
+                <a:latin typeface="Calibri"/>
+              </a:rPr>
+              <a:t>automático</a:t>
+            </a:r>
+            <a:r>
+              <a:rPr sz="930" b="0" i="0" dirty="0">
+                <a:solidFill>
+                  <a:srgbClr val="52514E"/>
+                </a:solidFill>
+                <a:latin typeface="Calibri"/>
+              </a:rPr>
+              <a:t> a Chile, </a:t>
+            </a:r>
+            <a:r>
+              <a:rPr sz="930" b="0" i="0" dirty="0" err="1">
+                <a:solidFill>
+                  <a:srgbClr val="52514E"/>
+                </a:solidFill>
+                <a:latin typeface="Calibri"/>
+              </a:rPr>
+              <a:t>estructura</a:t>
+            </a:r>
+            <a:r>
+              <a:rPr sz="930" b="0" i="0" dirty="0">
+                <a:solidFill>
+                  <a:srgbClr val="52514E"/>
+                </a:solidFill>
+                <a:latin typeface="Calibri"/>
+              </a:rPr>
+              <a:t> reproducible</a:t>
+            </a:r>
+            <a:r>
+              <a:rPr lang="es-419" sz="930" b="0" i="0" dirty="0">
+                <a:solidFill>
+                  <a:srgbClr val="52514E"/>
+                </a:solidFill>
+                <a:latin typeface="Calibri"/>
+              </a:rPr>
+              <a:t>.</a:t>
+            </a:r>
+            <a:endParaRPr sz="930" b="0" i="0" dirty="0">
+              <a:solidFill>
+                <a:srgbClr val="52514E"/>
+              </a:solidFill>
+              <a:latin typeface="Calibri"/>
+            </a:endParaRPr>
           </a:p>
         </p:txBody>
       </p:sp>
@@ -7403,7 +7902,7 @@
           <p:nvPr/>
         </p:nvPicPr>
         <p:blipFill>
-          <a:blip r:embed="rId2"/>
+          <a:blip r:embed="rId3"/>
           <a:stretch>
             <a:fillRect/>
           </a:stretch>
@@ -7563,7 +8062,7 @@
           <p:nvPr/>
         </p:nvPicPr>
         <p:blipFill>
-          <a:blip r:embed="rId3"/>
+          <a:blip r:embed="rId4"/>
           <a:stretch>
             <a:fillRect/>
           </a:stretch>
@@ -7641,166 +8140,13 @@
               </a:lnSpc>
             </a:pPr>
             <a:r>
-              <a:rPr sz="760" b="0" i="0" dirty="0" err="1">
+              <a:rPr sz="760" b="0" i="0">
                 <a:solidFill>
                   <a:srgbClr val="52514E"/>
                 </a:solidFill>
                 <a:latin typeface="Calibri"/>
               </a:rPr>
-              <a:t>Consolidar</a:t>
-            </a:r>
-            <a:r>
-              <a:rPr sz="760" b="0" i="0" dirty="0">
-                <a:solidFill>
-                  <a:srgbClr val="52514E"/>
-                </a:solidFill>
-                <a:latin typeface="Calibri"/>
-              </a:rPr>
-              <a:t> </a:t>
-            </a:r>
-            <a:r>
-              <a:rPr sz="760" b="0" i="0" dirty="0" err="1">
-                <a:solidFill>
-                  <a:srgbClr val="52514E"/>
-                </a:solidFill>
-                <a:latin typeface="Calibri"/>
-              </a:rPr>
-              <a:t>el</a:t>
-            </a:r>
-            <a:r>
-              <a:rPr sz="760" b="0" i="0" dirty="0">
-                <a:solidFill>
-                  <a:srgbClr val="52514E"/>
-                </a:solidFill>
-                <a:latin typeface="Calibri"/>
-              </a:rPr>
-              <a:t> pipeline de </a:t>
-            </a:r>
-            <a:r>
-              <a:rPr sz="760" b="0" i="0" dirty="0" err="1">
-                <a:solidFill>
-                  <a:srgbClr val="52514E"/>
-                </a:solidFill>
-                <a:latin typeface="Calibri"/>
-              </a:rPr>
-              <a:t>descarga</a:t>
-            </a:r>
-            <a:r>
-              <a:rPr sz="760" b="0" i="0" dirty="0">
-                <a:solidFill>
-                  <a:srgbClr val="52514E"/>
-                </a:solidFill>
-                <a:latin typeface="Calibri"/>
-              </a:rPr>
-              <a:t> y </a:t>
-            </a:r>
-            <a:r>
-              <a:rPr sz="760" b="0" i="0" dirty="0" err="1">
-                <a:solidFill>
-                  <a:srgbClr val="52514E"/>
-                </a:solidFill>
-                <a:latin typeface="Calibri"/>
-              </a:rPr>
-              <a:t>procesamiento</a:t>
-            </a:r>
-            <a:r>
-              <a:rPr sz="760" b="0" i="0" dirty="0">
-                <a:solidFill>
-                  <a:srgbClr val="52514E"/>
-                </a:solidFill>
-                <a:latin typeface="Calibri"/>
-              </a:rPr>
-              <a:t> multi-</a:t>
-            </a:r>
-            <a:r>
-              <a:rPr sz="760" b="0" i="0" dirty="0" err="1">
-                <a:solidFill>
-                  <a:srgbClr val="52514E"/>
-                </a:solidFill>
-                <a:latin typeface="Calibri"/>
-              </a:rPr>
-              <a:t>fuente</a:t>
-            </a:r>
-            <a:r>
-              <a:rPr sz="760" b="0" i="0" dirty="0">
-                <a:solidFill>
-                  <a:srgbClr val="52514E"/>
-                </a:solidFill>
-                <a:latin typeface="Calibri"/>
-              </a:rPr>
-              <a:t> (10 </a:t>
-            </a:r>
-            <a:r>
-              <a:rPr sz="760" b="0" i="0" dirty="0" err="1">
-                <a:solidFill>
-                  <a:srgbClr val="52514E"/>
-                </a:solidFill>
-                <a:latin typeface="Calibri"/>
-              </a:rPr>
-              <a:t>productos</a:t>
-            </a:r>
-            <a:r>
-              <a:rPr sz="760" b="0" i="0" dirty="0">
-                <a:solidFill>
-                  <a:srgbClr val="52514E"/>
-                </a:solidFill>
-                <a:latin typeface="Calibri"/>
-              </a:rPr>
-              <a:t> + SINCA), con </a:t>
-            </a:r>
-            <a:r>
-              <a:rPr sz="760" b="0" i="0" dirty="0" err="1">
-                <a:solidFill>
-                  <a:srgbClr val="52514E"/>
-                </a:solidFill>
-                <a:latin typeface="Calibri"/>
-              </a:rPr>
-              <a:t>recorte</a:t>
-            </a:r>
-            <a:r>
-              <a:rPr sz="760" b="0" i="0" dirty="0">
-                <a:solidFill>
-                  <a:srgbClr val="52514E"/>
-                </a:solidFill>
-                <a:latin typeface="Calibri"/>
-              </a:rPr>
-              <a:t> a Chile y </a:t>
-            </a:r>
-            <a:r>
-              <a:rPr sz="760" b="0" i="0" dirty="0" err="1">
-                <a:solidFill>
-                  <a:srgbClr val="52514E"/>
-                </a:solidFill>
-                <a:latin typeface="Calibri"/>
-              </a:rPr>
-              <a:t>agregación</a:t>
-            </a:r>
-            <a:r>
-              <a:rPr sz="760" b="0" i="0" dirty="0">
-                <a:solidFill>
-                  <a:srgbClr val="52514E"/>
-                </a:solidFill>
-                <a:latin typeface="Calibri"/>
-              </a:rPr>
-              <a:t> </a:t>
-            </a:r>
-            <a:r>
-              <a:rPr sz="760" b="0" i="0" dirty="0" err="1">
-                <a:solidFill>
-                  <a:srgbClr val="52514E"/>
-                </a:solidFill>
-                <a:latin typeface="Calibri"/>
-              </a:rPr>
-              <a:t>comunal</a:t>
-            </a:r>
-            <a:r>
-              <a:rPr sz="760" b="0" i="0" dirty="0">
-                <a:solidFill>
-                  <a:srgbClr val="52514E"/>
-                </a:solidFill>
-                <a:latin typeface="Calibri"/>
-              </a:rPr>
-              <a:t>.</a:t>
+              <a:t>Consolidar el pipeline de descarga y procesamiento multi-fuente (10 productos + SINCA), con recorte a Chile y agregación comunal.</a:t>
             </a:r>
           </a:p>
         </p:txBody>
@@ -7906,7 +8252,7 @@
           <p:nvPr/>
         </p:nvPicPr>
         <p:blipFill>
-          <a:blip r:embed="rId4"/>
+          <a:blip r:embed="rId5"/>
           <a:stretch>
             <a:fillRect/>
           </a:stretch>
@@ -8096,7 +8442,7 @@
           <p:nvPr/>
         </p:nvPicPr>
         <p:blipFill>
-          <a:blip r:embed="rId5"/>
+          <a:blip r:embed="rId6"/>
           <a:stretch>
             <a:fillRect/>
           </a:stretch>
@@ -8286,7 +8632,7 @@
           <p:nvPr/>
         </p:nvPicPr>
         <p:blipFill>
-          <a:blip r:embed="rId6"/>
+          <a:blip r:embed="rId7"/>
           <a:stretch>
             <a:fillRect/>
           </a:stretch>
@@ -8476,7 +8822,7 @@
           <p:nvPr/>
         </p:nvPicPr>
         <p:blipFill>
-          <a:blip r:embed="rId7"/>
+          <a:blip r:embed="rId8"/>
           <a:stretch>
             <a:fillRect/>
           </a:stretch>
@@ -11116,7 +11462,7 @@
                 </a:solidFill>
                 <a:latin typeface="Calibri"/>
               </a:rPr>
-              <a:t>Equipo 2: José J. Romero · Roberto I. Ávila · Amaru S. Agüero          ¡Gracias!</a:t>
+              <a:t>Equipo 2: José J. Romero · Roberto I. Ávila · Amaru S. Agüero · Esteban A. González          ¡Gracias!</a:t>
             </a:r>
           </a:p>
         </p:txBody>
